--- a/VOIS_Major_Project_PPT_Submission_Template (2).pptx
+++ b/VOIS_Major_Project_PPT_Submission_Template (2).pptx
@@ -11581,8 +11581,8 @@
           </a:p>
         </p:txBody>
       </p:sp>
-      <mc:AlternateContent xmlns:mc="http://schemas.openxmlformats.org/markup-compatibility/2006">
-        <mc:Choice xmlns:a14="http://schemas.microsoft.com/office/drawing/2010/main" Requires="a14">
+      <mc:AlternateContent xmlns:mc="http://schemas.openxmlformats.org/markup-compatibility/2006" xmlns:a14="http://schemas.microsoft.com/office/drawing/2010/main">
+        <mc:Choice Requires="a14">
           <p:sp>
             <p:nvSpPr>
               <p:cNvPr id="2" name="TextBox 1">
@@ -11709,7 +11709,7 @@
             </p:txBody>
           </p:sp>
         </mc:Choice>
-        <mc:Fallback>
+        <mc:Fallback xmlns="">
           <p:sp>
             <p:nvSpPr>
               <p:cNvPr id="2" name="TextBox 1">
@@ -13870,6 +13870,44 @@
               <a:rPr lang="en-US" dirty="0"/>
               <a:t>https://github.com/alyana-pradeep/Seasonal-Agriculture-Performance-Analysis.git</a:t>
             </a:r>
+          </a:p>
+        </p:txBody>
+      </p:sp>
+      <p:sp>
+        <p:nvSpPr>
+          <p:cNvPr id="2" name="TextBox 1">
+            <a:extLst>
+              <a:ext uri="{FF2B5EF4-FFF2-40B4-BE49-F238E27FC236}">
+                <a16:creationId xmlns:a16="http://schemas.microsoft.com/office/drawing/2014/main" id="{EDF804B1-5BF8-6B41-B305-1874B68D03D7}"/>
+              </a:ext>
+            </a:extLst>
+          </p:cNvPr>
+          <p:cNvSpPr txBox="1"/>
+          <p:nvPr/>
+        </p:nvSpPr>
+        <p:spPr>
+          <a:xfrm>
+            <a:off x="729256" y="2444620"/>
+            <a:ext cx="2164760" cy="369332"/>
+          </a:xfrm>
+          <a:prstGeom prst="rect">
+            <a:avLst/>
+          </a:prstGeom>
+          <a:noFill/>
+        </p:spPr>
+        <p:txBody>
+          <a:bodyPr wrap="none" rtlCol="0">
+            <a:spAutoFit/>
+          </a:bodyPr>
+          <a:lstStyle/>
+          <a:p>
+            <a:r>
+              <a:rPr lang="en-IN" dirty="0">
+                <a:hlinkClick r:id="rId3"/>
+              </a:rPr>
+              <a:t>Project GitHub link</a:t>
+            </a:r>
+            <a:endParaRPr lang="en-IN" dirty="0"/>
           </a:p>
         </p:txBody>
       </p:sp>
@@ -17956,8 +17994,8 @@
           </a:p>
         </p:txBody>
       </p:sp>
-      <mc:AlternateContent xmlns:mc="http://schemas.openxmlformats.org/markup-compatibility/2006">
-        <mc:Choice xmlns:a14="http://schemas.microsoft.com/office/drawing/2010/main" Requires="a14">
+      <mc:AlternateContent xmlns:mc="http://schemas.openxmlformats.org/markup-compatibility/2006" xmlns:a14="http://schemas.microsoft.com/office/drawing/2010/main">
+        <mc:Choice Requires="a14">
           <p:sp>
             <p:nvSpPr>
               <p:cNvPr id="8" name="TextBox 7">
@@ -18045,7 +18083,7 @@
             </p:txBody>
           </p:sp>
         </mc:Choice>
-        <mc:Fallback>
+        <mc:Fallback xmlns="">
           <p:sp>
             <p:nvSpPr>
               <p:cNvPr id="8" name="TextBox 7">
@@ -18963,7 +19001,7 @@
         </p:blipFill>
         <p:spPr>
           <a:xfrm flipH="1">
-            <a:off x="50800" y="3820160"/>
+            <a:off x="10193176" y="1923988"/>
             <a:ext cx="1727200" cy="3010024"/>
           </a:xfrm>
           <a:prstGeom prst="rect">
